--- a/curso_es/pptx/S17.pptx
+++ b/curso_es/pptx/S17.pptx
@@ -3718,7 +3718,7 @@
                 </a:solidFill>
                 <a:latin typeface="Fredoka"/>
               </a:rPr>
-              <a:t>Caso 2 · En el grupo de clase</a:t>
+              <a:t>Caso 2 · En el grupo del equipo</a:t>
             </a:r>
           </a:p>
         </p:txBody>
@@ -3800,7 +3800,7 @@
                 </a:solidFill>
                 <a:latin typeface="Nunito Sans"/>
               </a:rPr>
-              <a:t>Dylan: «Omar, ¿por qué subiste la foto de Leire sin preguntarle?». Omar: «¿Y qué me dices de las fotos que sube Aitor? ¡Esas sí que son malas!».</a:t>
+              <a:t>Una chica: «Oye, ¿por qué no viniste al entrenamiento?». Un chico: «¿Y qué me dices de otro compañero, que lleva un mes sin venir?».</a:t>
             </a:r>
           </a:p>
         </p:txBody>
@@ -3848,7 +3848,7 @@
                 </a:solidFill>
                 <a:latin typeface="Nunito Sans"/>
               </a:rPr>
-              <a:t>¿Qué se discute? Si Omar hizo bien al subir la foto.</a:t>
+              <a:t>¿Qué se discute? Por qué el chico no fue al entrenamiento.</a:t>
             </a:r>
           </a:p>
           <a:p>
@@ -3873,7 +3873,7 @@
                 </a:solidFill>
                 <a:latin typeface="Nunito Sans"/>
               </a:rPr>
-              <a:t>¿Qué hace Omar? Habla de las fotos de Aitor.</a:t>
+              <a:t>¿Qué hace el chico? Habla de las faltas de otro compañero.</a:t>
             </a:r>
           </a:p>
           <a:p>
@@ -3898,7 +3898,7 @@
                 </a:solidFill>
                 <a:latin typeface="Nunito Sans"/>
               </a:rPr>
-              <a:t>¿Eso responde? No: aunque Aitor lo haga peor, la pregunta era sobre Omar.</a:t>
+              <a:t>¿Eso responde? No: aunque ese otro compañero lo haga peor, la pregunta era sobre él.</a:t>
             </a:r>
           </a:p>
           <a:p>
@@ -3923,7 +3923,7 @@
                 </a:solidFill>
                 <a:latin typeface="Nunito Sans"/>
               </a:rPr>
-              <a:t>Conclusión: pista falsa. Hay que volver a la pregunta: ¿por qué la subiste?</a:t>
+              <a:t>Conclusión: pista falsa. Hay que volver a la pregunta: ¿por qué no viniste?</a:t>
             </a:r>
           </a:p>
         </p:txBody>
@@ -4109,7 +4109,7 @@
                 </a:solidFill>
                 <a:latin typeface="Nunito Sans"/>
               </a:rPr>
-              <a:t>Yasmin y Chen discuten qué serie ver. Chen: «Espera, eso luego. ¿Ves que sale humo de la cocina?».</a:t>
+              <a:t>Una chica y un chico discuten qué serie ver. El chico: «Espera, eso luego. ¿Ves que sale humo de la cocina?».</a:t>
             </a:r>
           </a:p>
         </p:txBody>
@@ -4881,7 +4881,7 @@
                 </a:solidFill>
                 <a:latin typeface="Nunito Sans"/>
               </a:rPr>
-              <a:t>La madre de Naiara: «¿Has hecho los deberes de Matemáticas?». Naiara: «La profe de Mates está de baja toda la semana».</a:t>
+              <a:t>La madre de una chica: «¿Has hecho los deberes de Matemáticas?». La chica: «La profe de Mates está de baja toda la semana».</a:t>
             </a:r>
           </a:p>
         </p:txBody>
@@ -6607,7 +6607,7 @@
                 </a:solidFill>
                 <a:latin typeface="Nunito Sans"/>
               </a:rPr>
-              <a:t>La madre de Naiara: «¿Has hecho los deberes?». Naiara: «¿Sabías que el Athletic ha fichado a un delantero nuevo?».</a:t>
+              <a:t>La madre de una chica: «¿Has hecho los deberes?». La chica: «¿Sabías que el Athletic ha fichado a un delantero nuevo?».</a:t>
             </a:r>
           </a:p>
         </p:txBody>
@@ -6646,7 +6646,7 @@
                 </a:solidFill>
                 <a:latin typeface="Nunito Sans"/>
               </a:rPr>
-              <a:t>¿Ha contestado Naiara? ¿Por qué habrá cambiado de tema?</a:t>
+              <a:t>¿Ha contestado la chica? ¿Por qué habrá cambiado de tema?</a:t>
             </a:r>
           </a:p>
         </p:txBody>
@@ -7639,7 +7639,7 @@
                 </a:solidFill>
                 <a:latin typeface="Nunito Sans"/>
               </a:rPr>
-              <a:t>La madre de Naiara: «¿Has hecho los deberes?». Naiara: «¿Sabías que el Athletic ha fichado a un delantero nuevo?».</a:t>
+              <a:t>La madre de una chica: «¿Has hecho los deberes?». La chica: «¿Sabías que el Athletic ha fichado a un delantero nuevo?».</a:t>
             </a:r>
           </a:p>
         </p:txBody>
